--- a/content/resources/clase-3/Operadores_logicos.pptx
+++ b/content/resources/clase-3/Operadores_logicos.pptx
@@ -14969,7 +14969,7 @@
                 <a:cs typeface="Trebuchet MS"/>
                 <a:sym typeface="Trebuchet MS"/>
               </a:rPr>
-              <a:t>Reinel Tabares Soto</a:t>
+              <a:t>Johan Sebastian Piña Duran</a:t>
             </a:r>
             <a:endParaRPr b="0" i="0" sz="2000" u="none" cap="none" strike="noStrike">
               <a:solidFill>
@@ -15173,7 +15173,7 @@
                 <a:cs typeface="Trebuchet MS"/>
                 <a:sym typeface="Trebuchet MS"/>
               </a:rPr>
-              <a:t>reinel.tabares@ucaldas.edu.co</a:t>
+              <a:t>johan.duran@ucaldas.edu.co</a:t>
             </a:r>
             <a:endParaRPr b="0" i="0" sz="2000" u="none" cap="none" strike="noStrike">
               <a:solidFill>
